--- a/presentation_2026-W22_Group2.pptx
+++ b/presentation_2026-W22_Group2.pptx
@@ -2708,7 +2708,7 @@
             </a:pPr>
             <a:r>
               <a:rPr lang="en-GB"/>
-              <a:t>Our Human Score is Neutral with a total score of 15 out of 25. While technical conditions remain supportive and the market is holding above key moving averages, we believe the AI models underweighted two risks. First, Midterm Election Year seasonality creates a historical headwind. Second, market leadership remains relatively narrow, with a limited number of sectors driving gains. These factors reduce confidence in the bullish outlook and justify maintaining a more cautious stance ahead of the Core PCE Inflation Report.</a:t>
+              <a:t>Our key human insight was that market leadership appeared relatively narrow. While the major indices remained positive, Utilities significantly outperformed while Energy, Financials, and Materials lagged. Combined with Midterm Election Year seasonal weakness, we believe this creates a more balanced risk-reward profile than the AI consensus suggests. This was the primary reason we maintained a Neutral rather than Neutral-Bullish outlook.</a:t>
             </a:r>
             <a:endParaRPr/>
           </a:p>
@@ -10933,7 +10933,7 @@
             <a:tbl>
               <a:tblPr>
                 <a:noFill/>
-                <a:tableStyleId>{9E72EF93-4BFF-4285-927C-E3769D3F281D}</a:tableStyleId>
+                <a:tableStyleId>{5C0F291F-BA2F-47F4-8B5B-CF05989DDCF4}</a:tableStyleId>
               </a:tblPr>
               <a:tblGrid>
                 <a:gridCol w="1348400"/>
@@ -13444,44 +13444,16 @@
           </a:p>
         </p:txBody>
       </p:sp>
-      <p:pic>
-        <p:nvPicPr>
-          <p:cNvPr id="109" name="Google Shape;109;p20"/>
-          <p:cNvPicPr preferRelativeResize="0"/>
-          <p:nvPr/>
-        </p:nvPicPr>
-        <p:blipFill>
-          <a:blip r:embed="rId3">
-            <a:alphaModFix/>
-          </a:blip>
-          <a:stretch>
-            <a:fillRect/>
-          </a:stretch>
-        </p:blipFill>
-        <p:spPr>
-          <a:xfrm>
-            <a:off x="107400" y="597850"/>
-            <a:ext cx="6172436" cy="3406550"/>
-          </a:xfrm>
-          <a:prstGeom prst="rect">
-            <a:avLst/>
-          </a:prstGeom>
-          <a:noFill/>
-          <a:ln>
-            <a:noFill/>
-          </a:ln>
-        </p:spPr>
-      </p:pic>
       <p:sp>
         <p:nvSpPr>
-          <p:cNvPr id="110" name="Google Shape;110;p20"/>
+          <p:cNvPr id="109" name="Google Shape;109;p20"/>
           <p:cNvSpPr txBox="1"/>
           <p:nvPr/>
         </p:nvSpPr>
         <p:spPr>
           <a:xfrm>
-            <a:off x="78750" y="4049825"/>
-            <a:ext cx="8577900" cy="1046700"/>
+            <a:off x="-68650" y="4095250"/>
+            <a:ext cx="9039000" cy="1545300"/>
           </a:xfrm>
           <a:prstGeom prst="rect">
             <a:avLst/>
@@ -13498,22 +13470,73 @@
           <a:lstStyle/>
           <a:p>
             <a:pPr indent="0" lvl="0" marL="0" rtl="0" algn="l">
-              <a:spcBef>
-                <a:spcPts val="0"/>
-              </a:spcBef>
-              <a:spcAft>
-                <a:spcPts val="0"/>
-              </a:spcAft>
+              <a:lnSpc>
+                <a:spcPct val="115000"/>
+              </a:lnSpc>
+              <a:spcBef>
+                <a:spcPts val="1200"/>
+              </a:spcBef>
+              <a:spcAft>
+                <a:spcPts val="0"/>
+              </a:spcAft>
+              <a:buClr>
+                <a:schemeClr val="dk1"/>
+              </a:buClr>
+              <a:buSzPts val="1100"/>
+              <a:buFont typeface="Arial"/>
               <a:buNone/>
             </a:pPr>
             <a:r>
               <a:rPr lang="en-GB"/>
-              <a:t>The Human Score remains more cautious than the AI consensus. While technical conditions are supportive, the team believes the models underweighted two risks: Midterm Election Year seasonal weakness and narrow market leadership. These factors reduce confidence in the bullish outlook and support maintaining a Neutral stance ahead of Friday's Core PCE Inflation Report. </a:t>
+              <a:t>The Human Score is more cautious than the Neutral-Bullish AI consensus. While technical conditions remain supportive, the team believes seasonal weakness and narrow market leadership were underweighted by the AI models. These factors offset the positive trend signals and support a Neutral outlook ahead of the Core PCE report.</a:t>
+            </a:r>
+            <a:endParaRPr/>
+          </a:p>
+          <a:p>
+            <a:pPr indent="0" lvl="0" marL="0" rtl="0" algn="l">
+              <a:spcBef>
+                <a:spcPts val="1200"/>
+              </a:spcBef>
+              <a:spcAft>
+                <a:spcPts val="0"/>
+              </a:spcAft>
+              <a:buNone/>
+            </a:pPr>
+            <a:r>
+              <a:t/>
             </a:r>
             <a:endParaRPr/>
           </a:p>
         </p:txBody>
       </p:sp>
+      <p:pic>
+        <p:nvPicPr>
+          <p:cNvPr id="110" name="Google Shape;110;p20"/>
+          <p:cNvPicPr preferRelativeResize="0"/>
+          <p:nvPr/>
+        </p:nvPicPr>
+        <p:blipFill>
+          <a:blip r:embed="rId3">
+            <a:alphaModFix/>
+          </a:blip>
+          <a:stretch>
+            <a:fillRect/>
+          </a:stretch>
+        </p:blipFill>
+        <p:spPr>
+          <a:xfrm>
+            <a:off x="0" y="460200"/>
+            <a:ext cx="5603105" cy="3767475"/>
+          </a:xfrm>
+          <a:prstGeom prst="rect">
+            <a:avLst/>
+          </a:prstGeom>
+          <a:noFill/>
+          <a:ln>
+            <a:noFill/>
+          </a:ln>
+        </p:spPr>
+      </p:pic>
     </p:spTree>
   </p:cSld>
   <p:clrMapOvr>
